--- a/presentation/NT-Triage-Deck.pptx
+++ b/presentation/NT-Triage-Deck.pptx
@@ -191,7 +191,7 @@
             <c:bubble3D val="0"/>
             <c:extLst>
               <c:ext xmlns:c16="http://schemas.microsoft.com/office/drawing/2014/chart" uri="{C3380CC4-5D6E-409C-BE32-E72D297353CC}">
-                <c16:uniqueId val="{00000001-934D-41CB-ADB2-4818D99B8844}"/>
+                <c16:uniqueId val="{00000001-D4AE-4EEC-8024-104DC6767EC3}"/>
               </c:ext>
             </c:extLst>
           </c:dPt>
@@ -201,7 +201,7 @@
             <c:bubble3D val="0"/>
             <c:extLst>
               <c:ext xmlns:c16="http://schemas.microsoft.com/office/drawing/2014/chart" uri="{C3380CC4-5D6E-409C-BE32-E72D297353CC}">
-                <c16:uniqueId val="{00000003-934D-41CB-ADB2-4818D99B8844}"/>
+                <c16:uniqueId val="{00000003-D4AE-4EEC-8024-104DC6767EC3}"/>
               </c:ext>
             </c:extLst>
           </c:dPt>
@@ -217,7 +217,7 @@
             </c:spPr>
             <c:extLst>
               <c:ext xmlns:c16="http://schemas.microsoft.com/office/drawing/2014/chart" uri="{C3380CC4-5D6E-409C-BE32-E72D297353CC}">
-                <c16:uniqueId val="{00000005-934D-41CB-ADB2-4818D99B8844}"/>
+                <c16:uniqueId val="{00000005-D4AE-4EEC-8024-104DC6767EC3}"/>
               </c:ext>
             </c:extLst>
           </c:dPt>
@@ -233,7 +233,7 @@
             </c:spPr>
             <c:extLst>
               <c:ext xmlns:c16="http://schemas.microsoft.com/office/drawing/2014/chart" uri="{C3380CC4-5D6E-409C-BE32-E72D297353CC}">
-                <c16:uniqueId val="{00000007-934D-41CB-ADB2-4818D99B8844}"/>
+                <c16:uniqueId val="{00000007-D4AE-4EEC-8024-104DC6767EC3}"/>
               </c:ext>
             </c:extLst>
           </c:dPt>
@@ -249,7 +249,7 @@
             </c:spPr>
             <c:extLst>
               <c:ext xmlns:c16="http://schemas.microsoft.com/office/drawing/2014/chart" uri="{C3380CC4-5D6E-409C-BE32-E72D297353CC}">
-                <c16:uniqueId val="{00000009-934D-41CB-ADB2-4818D99B8844}"/>
+                <c16:uniqueId val="{00000009-D4AE-4EEC-8024-104DC6767EC3}"/>
               </c:ext>
             </c:extLst>
           </c:dPt>
@@ -339,7 +339,7 @@
           </c:val>
           <c:extLst>
             <c:ext xmlns:c16="http://schemas.microsoft.com/office/drawing/2014/chart" uri="{C3380CC4-5D6E-409C-BE32-E72D297353CC}">
-              <c16:uniqueId val="{0000000A-934D-41CB-ADB2-4818D99B8844}"/>
+              <c16:uniqueId val="{0000000A-D4AE-4EEC-8024-104DC6767EC3}"/>
             </c:ext>
           </c:extLst>
         </c:ser>
@@ -466,7 +466,7 @@
     </p:spTree>
     <p:extLst>
       <p:ext uri="{BB962C8B-B14F-4D97-AF65-F5344CB8AC3E}">
-        <p14:creationId xmlns:p14="http://schemas.microsoft.com/office/powerpoint/2010/main" val="3869061607"/>
+        <p14:creationId xmlns:p14="http://schemas.microsoft.com/office/powerpoint/2010/main" val="567585007"/>
       </p:ext>
     </p:extLst>
   </p:cSld>
@@ -5036,7 +5036,7 @@
             <a:hlinkClick r:id="rId3" action="ppaction://hlinksldjump"/>
             <a:extLst>
               <a:ext uri="{FF2B5EF4-FFF2-40B4-BE49-F238E27FC236}">
-                <a16:creationId xmlns:a16="http://schemas.microsoft.com/office/drawing/2014/main" id="{A1B34449-4F9E-8A12-8947-12F7F0068B47}"/>
+                <a16:creationId xmlns:a16="http://schemas.microsoft.com/office/drawing/2014/main" id="{0AB939FA-63F3-517E-42DB-93520DAA73B5}"/>
               </a:ext>
             </a:extLst>
           </p:cNvPr>
@@ -5870,7 +5870,7 @@
             <a:hlinkClick r:id="rId3" action="ppaction://hlinksldjump"/>
             <a:extLst>
               <a:ext uri="{FF2B5EF4-FFF2-40B4-BE49-F238E27FC236}">
-                <a16:creationId xmlns:a16="http://schemas.microsoft.com/office/drawing/2014/main" id="{B33BFC98-1B56-BCEB-4D1B-07FECE5420D6}"/>
+                <a16:creationId xmlns:a16="http://schemas.microsoft.com/office/drawing/2014/main" id="{A7510A62-6EB8-73D0-EFA3-DAE6A000EA8C}"/>
               </a:ext>
             </a:extLst>
           </p:cNvPr>
@@ -16043,7 +16043,7 @@
             <a:hlinkClick r:id="rId13" action="ppaction://hlinksldjump"/>
             <a:extLst>
               <a:ext uri="{FF2B5EF4-FFF2-40B4-BE49-F238E27FC236}">
-                <a16:creationId xmlns:a16="http://schemas.microsoft.com/office/drawing/2014/main" id="{A2E54E8F-3FFF-A0E7-0F6B-F01CD30F5165}"/>
+                <a16:creationId xmlns:a16="http://schemas.microsoft.com/office/drawing/2014/main" id="{B9086761-F4F7-44C1-A04A-805D3AA297DB}"/>
               </a:ext>
             </a:extLst>
           </p:cNvPr>
@@ -21389,7 +21389,7 @@
             <a:hlinkClick r:id="rId15" action="ppaction://hlinksldjump"/>
             <a:extLst>
               <a:ext uri="{FF2B5EF4-FFF2-40B4-BE49-F238E27FC236}">
-                <a16:creationId xmlns:a16="http://schemas.microsoft.com/office/drawing/2014/main" id="{A86540C3-6470-3480-25C9-22B1CE762A4E}"/>
+                <a16:creationId xmlns:a16="http://schemas.microsoft.com/office/drawing/2014/main" id="{A7068D9C-C24B-8618-CE60-0A3395195452}"/>
               </a:ext>
             </a:extLst>
           </p:cNvPr>
